--- a/dist/초6/수학/연산과비례/초6_수학_연산과비례_01_분수의나눗셈1_학생용.pptx
+++ b/dist/초6/수학/연산과비례/초6_수학_연산과비례_01_분수의나눗셈1_학생용.pptx
@@ -120,13 +120,13 @@
   <p:extLst>
     <p:ext uri="{521415D9-36F7-43E2-AB2F-B90AF26B5E84}">
       <p14:sectionLst xmlns:p14="http://schemas.microsoft.com/office/powerpoint/2010/main">
-        <p14:section name="도입" id="{fe26bbe5-6b61-cc02-d41d-7df6cb30e8f0}">
+        <p14:section name="도입" id="{3489db1e-e684-6cbc-b8c0-bb2166825929}">
           <p14:sldIdLst>
             <p14:sldId id="256"/>
             <p14:sldId id="257"/>
           </p14:sldIdLst>
         </p14:section>
-        <p14:section name="개념" id="{1ddc71e4-0878-3904-842b-a93476e0ea7a}">
+        <p14:section name="개념" id="{8ae4e98a-b76d-5e39-6cd9-03c0d00652f2}">
           <p14:sldIdLst>
             <p14:sldId id="258"/>
             <p14:sldId id="259"/>
@@ -135,31 +135,31 @@
             <p14:sldId id="263"/>
           </p14:sldIdLst>
         </p14:section>
-        <p14:section name="연습" id="{4e2ee810-39c9-3b9d-813f-9aa2ca3d5f3d}">
+        <p14:section name="연습" id="{f1de05e4-4ddb-5ebf-898b-47b220e84076}">
           <p14:sldIdLst>
             <p14:sldId id="260"/>
             <p14:sldId id="264"/>
             <p14:sldId id="265"/>
           </p14:sldIdLst>
         </p14:section>
-        <p14:section name="개념" id="{11253de7-b2e8-9e41-880a-ff9e3ad97d1b}">
+        <p14:section name="개념" id="{e0daf177-cef5-e75e-1bfc-796aa9fa0c45}">
           <p14:sldIdLst/>
         </p14:section>
-        <p14:section name="연습" id="{e60bcd36-5350-cf53-24bd-97de1685c57e}">
+        <p14:section name="연습" id="{a01203e1-1249-12ee-9135-e1fedef5397d}">
           <p14:sldIdLst/>
         </p14:section>
-        <p14:section name="확인" id="{5d609020-2267-0b8d-8b83-3d91a068a07c}">
+        <p14:section name="확인" id="{17920fd7-bcf6-d9fc-e722-374f168eaa6b}">
           <p14:sldIdLst>
             <p14:sldId id="266"/>
             <p14:sldId id="267"/>
           </p14:sldIdLst>
         </p14:section>
-        <p14:section name="정리" id="{f35eaa80-496f-309d-dae1-7bbc2974d3f4}">
+        <p14:section name="정리" id="{43f87360-a697-876e-0074-664acac57b91}">
           <p14:sldIdLst>
             <p14:sldId id="268"/>
           </p14:sldIdLst>
         </p14:section>
-        <p14:section name="보충" id="{3e150215-a2cb-07a5-c7bc-aef46c126bfe}">
+        <p14:section name="보충" id="{5ba1a490-5d9c-971b-99be-88d8c67fefda}">
           <p14:sldIdLst>
             <p14:sldId id="269"/>
           </p14:sldIdLst>
